--- a/Novosibirsk_State_University/Дипломная работа/Доклады/Презентация.pptx
+++ b/Novosibirsk_State_University/Дипломная работа/Доклады/Презентация.pptx
@@ -13,7 +13,7 @@
     <p:sldId id="263" r:id="rId7"/>
     <p:sldId id="265" r:id="rId8"/>
     <p:sldId id="266" r:id="rId9"/>
-    <p:sldId id="267" r:id="rId10"/>
+    <p:sldId id="268" r:id="rId10"/>
   </p:sldIdLst>
   <p:sldSz cx="12192000" cy="6858000"/>
   <p:notesSz cx="6858000" cy="9144000"/>
@@ -267,7 +267,7 @@
           <a:p>
             <a:fld id="{E5E135CD-7995-4FAF-B5C2-FAD203FFAD63}" type="datetimeFigureOut">
               <a:rPr lang="ru-RU" smtClean="0"/>
-              <a:t>02.12.2025</a:t>
+              <a:t>24.02.2026</a:t>
             </a:fld>
             <a:endParaRPr lang="ru-RU"/>
           </a:p>
@@ -465,7 +465,7 @@
           <a:p>
             <a:fld id="{E5E135CD-7995-4FAF-B5C2-FAD203FFAD63}" type="datetimeFigureOut">
               <a:rPr lang="ru-RU" smtClean="0"/>
-              <a:t>02.12.2025</a:t>
+              <a:t>24.02.2026</a:t>
             </a:fld>
             <a:endParaRPr lang="ru-RU"/>
           </a:p>
@@ -673,7 +673,7 @@
           <a:p>
             <a:fld id="{E5E135CD-7995-4FAF-B5C2-FAD203FFAD63}" type="datetimeFigureOut">
               <a:rPr lang="ru-RU" smtClean="0"/>
-              <a:t>02.12.2025</a:t>
+              <a:t>24.02.2026</a:t>
             </a:fld>
             <a:endParaRPr lang="ru-RU"/>
           </a:p>
@@ -871,7 +871,7 @@
           <a:p>
             <a:fld id="{E5E135CD-7995-4FAF-B5C2-FAD203FFAD63}" type="datetimeFigureOut">
               <a:rPr lang="ru-RU" smtClean="0"/>
-              <a:t>02.12.2025</a:t>
+              <a:t>24.02.2026</a:t>
             </a:fld>
             <a:endParaRPr lang="ru-RU"/>
           </a:p>
@@ -1146,7 +1146,7 @@
           <a:p>
             <a:fld id="{E5E135CD-7995-4FAF-B5C2-FAD203FFAD63}" type="datetimeFigureOut">
               <a:rPr lang="ru-RU" smtClean="0"/>
-              <a:t>02.12.2025</a:t>
+              <a:t>24.02.2026</a:t>
             </a:fld>
             <a:endParaRPr lang="ru-RU"/>
           </a:p>
@@ -1411,7 +1411,7 @@
           <a:p>
             <a:fld id="{E5E135CD-7995-4FAF-B5C2-FAD203FFAD63}" type="datetimeFigureOut">
               <a:rPr lang="ru-RU" smtClean="0"/>
-              <a:t>02.12.2025</a:t>
+              <a:t>24.02.2026</a:t>
             </a:fld>
             <a:endParaRPr lang="ru-RU"/>
           </a:p>
@@ -1823,7 +1823,7 @@
           <a:p>
             <a:fld id="{E5E135CD-7995-4FAF-B5C2-FAD203FFAD63}" type="datetimeFigureOut">
               <a:rPr lang="ru-RU" smtClean="0"/>
-              <a:t>02.12.2025</a:t>
+              <a:t>24.02.2026</a:t>
             </a:fld>
             <a:endParaRPr lang="ru-RU"/>
           </a:p>
@@ -1964,7 +1964,7 @@
           <a:p>
             <a:fld id="{E5E135CD-7995-4FAF-B5C2-FAD203FFAD63}" type="datetimeFigureOut">
               <a:rPr lang="ru-RU" smtClean="0"/>
-              <a:t>02.12.2025</a:t>
+              <a:t>24.02.2026</a:t>
             </a:fld>
             <a:endParaRPr lang="ru-RU"/>
           </a:p>
@@ -2077,7 +2077,7 @@
           <a:p>
             <a:fld id="{E5E135CD-7995-4FAF-B5C2-FAD203FFAD63}" type="datetimeFigureOut">
               <a:rPr lang="ru-RU" smtClean="0"/>
-              <a:t>02.12.2025</a:t>
+              <a:t>24.02.2026</a:t>
             </a:fld>
             <a:endParaRPr lang="ru-RU"/>
           </a:p>
@@ -2388,7 +2388,7 @@
           <a:p>
             <a:fld id="{E5E135CD-7995-4FAF-B5C2-FAD203FFAD63}" type="datetimeFigureOut">
               <a:rPr lang="ru-RU" smtClean="0"/>
-              <a:t>02.12.2025</a:t>
+              <a:t>24.02.2026</a:t>
             </a:fld>
             <a:endParaRPr lang="ru-RU"/>
           </a:p>
@@ -2676,7 +2676,7 @@
           <a:p>
             <a:fld id="{E5E135CD-7995-4FAF-B5C2-FAD203FFAD63}" type="datetimeFigureOut">
               <a:rPr lang="ru-RU" smtClean="0"/>
-              <a:t>02.12.2025</a:t>
+              <a:t>24.02.2026</a:t>
             </a:fld>
             <a:endParaRPr lang="ru-RU"/>
           </a:p>
@@ -2917,7 +2917,7 @@
           <a:p>
             <a:fld id="{E5E135CD-7995-4FAF-B5C2-FAD203FFAD63}" type="datetimeFigureOut">
               <a:rPr lang="ru-RU" smtClean="0"/>
-              <a:t>02.12.2025</a:t>
+              <a:t>24.02.2026</a:t>
             </a:fld>
             <a:endParaRPr lang="ru-RU"/>
           </a:p>
@@ -3390,8 +3390,8 @@
         </p:nvSpPr>
         <p:spPr>
           <a:xfrm>
-            <a:off x="9421906" y="5629835"/>
-            <a:ext cx="2447363" cy="1048870"/>
+            <a:off x="7872000" y="6138000"/>
+            <a:ext cx="4320000" cy="720000"/>
           </a:xfrm>
         </p:spPr>
         <p:txBody>
@@ -3400,23 +3400,12 @@
           </a:bodyPr>
           <a:lstStyle/>
           <a:p>
-            <a:pPr algn="l"/>
             <a:r>
               <a:rPr lang="ru-RU" dirty="0">
                 <a:latin typeface="Times New Roman" panose="02020603050405020304" pitchFamily="18" charset="0"/>
                 <a:cs typeface="Times New Roman" panose="02020603050405020304" pitchFamily="18" charset="0"/>
               </a:rPr>
-              <a:t>Докладчик:</a:t>
-            </a:r>
-          </a:p>
-          <a:p>
-            <a:pPr algn="l"/>
-            <a:r>
-              <a:rPr lang="ru-RU" dirty="0">
-                <a:latin typeface="Times New Roman" panose="02020603050405020304" pitchFamily="18" charset="0"/>
-                <a:cs typeface="Times New Roman" panose="02020603050405020304" pitchFamily="18" charset="0"/>
-              </a:rPr>
-              <a:t>Климов Богдан</a:t>
+              <a:t>Докладчик: Климов Богдан</a:t>
             </a:r>
           </a:p>
         </p:txBody>
@@ -3529,7 +3518,7 @@
           <a:bodyPr/>
           <a:lstStyle/>
           <a:p>
-            <a:pPr marL="0" indent="0">
+            <a:pPr marL="0" indent="0" algn="just">
               <a:buNone/>
             </a:pPr>
             <a:r>
@@ -3541,7 +3530,7 @@
             </a:r>
           </a:p>
           <a:p>
-            <a:pPr marL="0" indent="0">
+            <a:pPr marL="0" indent="0" algn="just">
               <a:buNone/>
             </a:pPr>
             <a:endParaRPr lang="ru-RU" dirty="0">
@@ -3550,7 +3539,7 @@
             </a:endParaRPr>
           </a:p>
           <a:p>
-            <a:pPr marL="0" indent="0">
+            <a:pPr marL="0" indent="0" algn="just">
               <a:buNone/>
             </a:pPr>
             <a:r>
@@ -3562,6 +3551,7 @@
             </a:r>
           </a:p>
           <a:p>
+            <a:pPr algn="just"/>
             <a:r>
               <a:rPr lang="ru-RU" dirty="0">
                 <a:latin typeface="Times New Roman" panose="02020603050405020304" pitchFamily="18" charset="0"/>
@@ -3571,12 +3561,52 @@
             </a:r>
           </a:p>
           <a:p>
+            <a:pPr algn="just"/>
             <a:r>
               <a:rPr lang="ru-RU" dirty="0">
                 <a:latin typeface="Times New Roman" panose="02020603050405020304" pitchFamily="18" charset="0"/>
                 <a:cs typeface="Times New Roman" panose="02020603050405020304" pitchFamily="18" charset="0"/>
               </a:rPr>
               <a:t>Промышленная собственность.</a:t>
+            </a:r>
+          </a:p>
+        </p:txBody>
+      </p:sp>
+      <p:sp>
+        <p:nvSpPr>
+          <p:cNvPr id="4" name="TextBox 3">
+            <a:extLst>
+              <a:ext uri="{FF2B5EF4-FFF2-40B4-BE49-F238E27FC236}">
+                <a16:creationId xmlns:a16="http://schemas.microsoft.com/office/drawing/2014/main" id="{99421559-08E5-4C91-9CBD-1211AD8E9F66}"/>
+              </a:ext>
+            </a:extLst>
+          </p:cNvPr>
+          <p:cNvSpPr txBox="1"/>
+          <p:nvPr/>
+        </p:nvSpPr>
+        <p:spPr>
+          <a:xfrm>
+            <a:off x="11832000" y="6498000"/>
+            <a:ext cx="360000" cy="360000"/>
+          </a:xfrm>
+          <a:prstGeom prst="rect">
+            <a:avLst/>
+          </a:prstGeom>
+          <a:noFill/>
+        </p:spPr>
+        <p:txBody>
+          <a:bodyPr wrap="none" rtlCol="0" anchor="ctr">
+            <a:spAutoFit/>
+          </a:bodyPr>
+          <a:lstStyle/>
+          <a:p>
+            <a:pPr algn="ctr"/>
+            <a:r>
+              <a:rPr lang="ru-RU" dirty="0">
+                <a:latin typeface="Times New Roman" panose="02020603050405020304" pitchFamily="18" charset="0"/>
+                <a:cs typeface="Times New Roman" panose="02020603050405020304" pitchFamily="18" charset="0"/>
+              </a:rPr>
+              <a:t>2</a:t>
             </a:r>
           </a:p>
         </p:txBody>
@@ -3678,6 +3708,7 @@
           </a:bodyPr>
           <a:lstStyle/>
           <a:p>
+            <a:pPr algn="just"/>
             <a:r>
               <a:rPr lang="ru-RU" dirty="0">
                 <a:latin typeface="Times New Roman" panose="02020603050405020304" pitchFamily="18" charset="0"/>
@@ -3687,7 +3718,7 @@
             </a:r>
           </a:p>
           <a:p>
-            <a:pPr lvl="1">
+            <a:pPr lvl="1" algn="just">
               <a:buFont typeface="Wingdings" panose="05000000000000000000" pitchFamily="2" charset="2"/>
               <a:buChar char="Ø"/>
             </a:pPr>
@@ -3700,7 +3731,7 @@
             </a:r>
           </a:p>
           <a:p>
-            <a:pPr lvl="1">
+            <a:pPr lvl="1" algn="just">
               <a:buFont typeface="Wingdings" panose="05000000000000000000" pitchFamily="2" charset="2"/>
               <a:buChar char="Ø"/>
             </a:pPr>
@@ -3713,7 +3744,7 @@
             </a:r>
           </a:p>
           <a:p>
-            <a:pPr lvl="1">
+            <a:pPr lvl="1" algn="just">
               <a:buFont typeface="Wingdings" panose="05000000000000000000" pitchFamily="2" charset="2"/>
               <a:buChar char="Ø"/>
             </a:pPr>
@@ -3726,7 +3757,7 @@
             </a:r>
           </a:p>
           <a:p>
-            <a:pPr lvl="1">
+            <a:pPr lvl="1" algn="just">
               <a:buFont typeface="Wingdings" panose="05000000000000000000" pitchFamily="2" charset="2"/>
               <a:buChar char="Ø"/>
             </a:pPr>
@@ -3739,7 +3770,7 @@
             </a:r>
           </a:p>
           <a:p>
-            <a:pPr lvl="1">
+            <a:pPr lvl="1" algn="just">
               <a:buFont typeface="Wingdings" panose="05000000000000000000" pitchFamily="2" charset="2"/>
               <a:buChar char="Ø"/>
             </a:pPr>
@@ -3752,6 +3783,7 @@
             </a:r>
           </a:p>
           <a:p>
+            <a:pPr algn="just"/>
             <a:r>
               <a:rPr lang="ru-RU" dirty="0">
                 <a:latin typeface="Times New Roman" panose="02020603050405020304" pitchFamily="18" charset="0"/>
@@ -3761,7 +3793,7 @@
             </a:r>
           </a:p>
           <a:p>
-            <a:pPr lvl="1">
+            <a:pPr lvl="1" algn="just">
               <a:buFont typeface="Wingdings" panose="05000000000000000000" pitchFamily="2" charset="2"/>
               <a:buChar char="Ø"/>
             </a:pPr>
@@ -3774,7 +3806,7 @@
             </a:r>
           </a:p>
           <a:p>
-            <a:pPr lvl="1">
+            <a:pPr lvl="1" algn="just">
               <a:buFont typeface="Wingdings" panose="05000000000000000000" pitchFamily="2" charset="2"/>
               <a:buChar char="Ø"/>
             </a:pPr>
@@ -3787,7 +3819,7 @@
             </a:r>
           </a:p>
           <a:p>
-            <a:pPr lvl="1">
+            <a:pPr lvl="1" algn="just">
               <a:buFont typeface="Wingdings" panose="05000000000000000000" pitchFamily="2" charset="2"/>
               <a:buChar char="Ø"/>
             </a:pPr>
@@ -3800,7 +3832,7 @@
             </a:r>
           </a:p>
           <a:p>
-            <a:pPr lvl="1">
+            <a:pPr lvl="1" algn="just">
               <a:buFont typeface="Wingdings" panose="05000000000000000000" pitchFamily="2" charset="2"/>
               <a:buChar char="Ø"/>
             </a:pPr>
@@ -3813,7 +3845,7 @@
             </a:r>
           </a:p>
           <a:p>
-            <a:pPr lvl="1">
+            <a:pPr lvl="1" algn="just">
               <a:buFont typeface="Wingdings" panose="05000000000000000000" pitchFamily="2" charset="2"/>
               <a:buChar char="Ø"/>
             </a:pPr>
@@ -3826,7 +3858,7 @@
             </a:r>
           </a:p>
           <a:p>
-            <a:pPr lvl="1">
+            <a:pPr lvl="1" algn="just">
               <a:buFont typeface="Wingdings" panose="05000000000000000000" pitchFamily="2" charset="2"/>
               <a:buChar char="Ø"/>
             </a:pPr>
@@ -3836,6 +3868,45 @@
                 <a:cs typeface="Times New Roman" panose="02020603050405020304" pitchFamily="18" charset="0"/>
               </a:rPr>
               <a:t>Товарный знак.</a:t>
+            </a:r>
+          </a:p>
+        </p:txBody>
+      </p:sp>
+      <p:sp>
+        <p:nvSpPr>
+          <p:cNvPr id="5" name="TextBox 4">
+            <a:extLst>
+              <a:ext uri="{FF2B5EF4-FFF2-40B4-BE49-F238E27FC236}">
+                <a16:creationId xmlns:a16="http://schemas.microsoft.com/office/drawing/2014/main" id="{01E9E604-D002-4CDC-8BCD-BA0408817A9E}"/>
+              </a:ext>
+            </a:extLst>
+          </p:cNvPr>
+          <p:cNvSpPr txBox="1"/>
+          <p:nvPr/>
+        </p:nvSpPr>
+        <p:spPr>
+          <a:xfrm>
+            <a:off x="11832000" y="6498000"/>
+            <a:ext cx="360000" cy="360000"/>
+          </a:xfrm>
+          <a:prstGeom prst="rect">
+            <a:avLst/>
+          </a:prstGeom>
+          <a:noFill/>
+        </p:spPr>
+        <p:txBody>
+          <a:bodyPr wrap="none" rtlCol="0" anchor="ctr">
+            <a:spAutoFit/>
+          </a:bodyPr>
+          <a:lstStyle/>
+          <a:p>
+            <a:pPr algn="ctr"/>
+            <a:r>
+              <a:rPr lang="ru-RU" dirty="0">
+                <a:latin typeface="Times New Roman" panose="02020603050405020304" pitchFamily="18" charset="0"/>
+                <a:cs typeface="Times New Roman" panose="02020603050405020304" pitchFamily="18" charset="0"/>
+              </a:rPr>
+              <a:t>3</a:t>
             </a:r>
           </a:p>
         </p:txBody>
@@ -3948,7 +4019,7 @@
           </a:bodyPr>
           <a:lstStyle/>
           <a:p>
-            <a:pPr marL="0" indent="0">
+            <a:pPr marL="0" indent="0" algn="just">
               <a:buNone/>
             </a:pPr>
             <a:r>
@@ -3960,7 +4031,7 @@
             </a:r>
           </a:p>
           <a:p>
-            <a:pPr marL="0" indent="0">
+            <a:pPr marL="0" indent="0" algn="just">
               <a:buNone/>
             </a:pPr>
             <a:r>
@@ -3972,6 +4043,7 @@
             </a:r>
           </a:p>
           <a:p>
+            <a:pPr algn="just"/>
             <a:r>
               <a:rPr lang="ru-RU" dirty="0">
                 <a:latin typeface="Times New Roman" panose="02020603050405020304" pitchFamily="18" charset="0"/>
@@ -3981,6 +4053,7 @@
             </a:r>
           </a:p>
           <a:p>
+            <a:pPr algn="just"/>
             <a:r>
               <a:rPr lang="ru-RU" dirty="0">
                 <a:latin typeface="Times New Roman" panose="02020603050405020304" pitchFamily="18" charset="0"/>
@@ -4004,12 +4077,52 @@
             </a:r>
           </a:p>
           <a:p>
+            <a:pPr algn="just"/>
             <a:r>
               <a:rPr lang="ru-RU" dirty="0">
                 <a:latin typeface="Times New Roman" panose="02020603050405020304" pitchFamily="18" charset="0"/>
                 <a:cs typeface="Times New Roman" panose="02020603050405020304" pitchFamily="18" charset="0"/>
               </a:rPr>
               <a:t>Патент запрещает любое коммерческое использование защищённого решения всем третьим лицам, даже если они создали его независимо.</a:t>
+            </a:r>
+          </a:p>
+        </p:txBody>
+      </p:sp>
+      <p:sp>
+        <p:nvSpPr>
+          <p:cNvPr id="4" name="TextBox 3">
+            <a:extLst>
+              <a:ext uri="{FF2B5EF4-FFF2-40B4-BE49-F238E27FC236}">
+                <a16:creationId xmlns:a16="http://schemas.microsoft.com/office/drawing/2014/main" id="{1B794A7F-BFBF-4F6A-9557-B9341620472F}"/>
+              </a:ext>
+            </a:extLst>
+          </p:cNvPr>
+          <p:cNvSpPr txBox="1"/>
+          <p:nvPr/>
+        </p:nvSpPr>
+        <p:spPr>
+          <a:xfrm>
+            <a:off x="11832000" y="6498000"/>
+            <a:ext cx="360000" cy="360000"/>
+          </a:xfrm>
+          <a:prstGeom prst="rect">
+            <a:avLst/>
+          </a:prstGeom>
+          <a:noFill/>
+        </p:spPr>
+        <p:txBody>
+          <a:bodyPr wrap="none" rtlCol="0" anchor="ctr">
+            <a:spAutoFit/>
+          </a:bodyPr>
+          <a:lstStyle/>
+          <a:p>
+            <a:pPr algn="ctr"/>
+            <a:r>
+              <a:rPr lang="ru-RU" dirty="0">
+                <a:latin typeface="Times New Roman" panose="02020603050405020304" pitchFamily="18" charset="0"/>
+                <a:cs typeface="Times New Roman" panose="02020603050405020304" pitchFamily="18" charset="0"/>
+              </a:rPr>
+              <a:t>4</a:t>
             </a:r>
           </a:p>
         </p:txBody>
@@ -4109,7 +4222,7 @@
           <a:bodyPr/>
           <a:lstStyle/>
           <a:p>
-            <a:pPr marL="0" indent="0">
+            <a:pPr marL="0" indent="0" algn="just">
               <a:buNone/>
             </a:pPr>
             <a:r>
@@ -4118,6 +4231,45 @@
                 <a:cs typeface="Times New Roman" panose="02020603050405020304" pitchFamily="18" charset="0"/>
               </a:rPr>
               <a:t>Формула патента — это краткое, юридически точное описание изобретения, которое определяет объем правовой охраны, предоставляемой патентом. Она содержит ключевые признаки изобретения, отличающие его от существующих аналогов, и является основой для определения того, что именно защищено патентом. Формулу патента используют для проверки патентоспособности (новизны, изобретательского уровня, промышленной применимости).</a:t>
+            </a:r>
+          </a:p>
+        </p:txBody>
+      </p:sp>
+      <p:sp>
+        <p:nvSpPr>
+          <p:cNvPr id="4" name="TextBox 3">
+            <a:extLst>
+              <a:ext uri="{FF2B5EF4-FFF2-40B4-BE49-F238E27FC236}">
+                <a16:creationId xmlns:a16="http://schemas.microsoft.com/office/drawing/2014/main" id="{EF60FC8D-7FA4-485B-A95B-FD426EFEFA4D}"/>
+              </a:ext>
+            </a:extLst>
+          </p:cNvPr>
+          <p:cNvSpPr txBox="1"/>
+          <p:nvPr/>
+        </p:nvSpPr>
+        <p:spPr>
+          <a:xfrm>
+            <a:off x="11832000" y="6498000"/>
+            <a:ext cx="360000" cy="360000"/>
+          </a:xfrm>
+          <a:prstGeom prst="rect">
+            <a:avLst/>
+          </a:prstGeom>
+          <a:noFill/>
+        </p:spPr>
+        <p:txBody>
+          <a:bodyPr wrap="none" rtlCol="0" anchor="ctr">
+            <a:spAutoFit/>
+          </a:bodyPr>
+          <a:lstStyle/>
+          <a:p>
+            <a:pPr algn="ctr"/>
+            <a:r>
+              <a:rPr lang="ru-RU" dirty="0">
+                <a:latin typeface="Times New Roman" panose="02020603050405020304" pitchFamily="18" charset="0"/>
+                <a:cs typeface="Times New Roman" panose="02020603050405020304" pitchFamily="18" charset="0"/>
+              </a:rPr>
+              <a:t>5</a:t>
             </a:r>
           </a:p>
         </p:txBody>
@@ -4219,6 +4371,7 @@
           </a:bodyPr>
           <a:lstStyle/>
           <a:p>
+            <a:pPr algn="just"/>
             <a:r>
               <a:rPr lang="ru-RU" dirty="0">
                 <a:latin typeface="Times New Roman" panose="02020603050405020304" pitchFamily="18" charset="0"/>
@@ -4228,6 +4381,7 @@
             </a:r>
           </a:p>
           <a:p>
+            <a:pPr algn="just"/>
             <a:r>
               <a:rPr lang="ru-RU" dirty="0">
                 <a:latin typeface="Times New Roman" panose="02020603050405020304" pitchFamily="18" charset="0"/>
@@ -4237,6 +4391,7 @@
             </a:r>
           </a:p>
           <a:p>
+            <a:pPr algn="just"/>
             <a:r>
               <a:rPr lang="ru-RU" dirty="0">
                 <a:latin typeface="Times New Roman" panose="02020603050405020304" pitchFamily="18" charset="0"/>
@@ -4246,12 +4401,52 @@
             </a:r>
           </a:p>
           <a:p>
+            <a:pPr algn="just"/>
             <a:r>
               <a:rPr lang="ru-RU" dirty="0">
                 <a:latin typeface="Times New Roman" panose="02020603050405020304" pitchFamily="18" charset="0"/>
                 <a:cs typeface="Times New Roman" panose="02020603050405020304" pitchFamily="18" charset="0"/>
               </a:rPr>
               <a:t>Поддержка описанием: Каждый признак, упомянутый в формуле, должен быть полно раскрыт и обоснован в основном описании патента.</a:t>
+            </a:r>
+          </a:p>
+        </p:txBody>
+      </p:sp>
+      <p:sp>
+        <p:nvSpPr>
+          <p:cNvPr id="4" name="TextBox 3">
+            <a:extLst>
+              <a:ext uri="{FF2B5EF4-FFF2-40B4-BE49-F238E27FC236}">
+                <a16:creationId xmlns:a16="http://schemas.microsoft.com/office/drawing/2014/main" id="{19E994D7-3F52-4CD6-A87A-01F5D08982D8}"/>
+              </a:ext>
+            </a:extLst>
+          </p:cNvPr>
+          <p:cNvSpPr txBox="1"/>
+          <p:nvPr/>
+        </p:nvSpPr>
+        <p:spPr>
+          <a:xfrm>
+            <a:off x="11832000" y="6498000"/>
+            <a:ext cx="360000" cy="360000"/>
+          </a:xfrm>
+          <a:prstGeom prst="rect">
+            <a:avLst/>
+          </a:prstGeom>
+          <a:noFill/>
+        </p:spPr>
+        <p:txBody>
+          <a:bodyPr wrap="none" rtlCol="0" anchor="ctr">
+            <a:spAutoFit/>
+          </a:bodyPr>
+          <a:lstStyle/>
+          <a:p>
+            <a:pPr algn="ctr"/>
+            <a:r>
+              <a:rPr lang="ru-RU" dirty="0">
+                <a:latin typeface="Times New Roman" panose="02020603050405020304" pitchFamily="18" charset="0"/>
+                <a:cs typeface="Times New Roman" panose="02020603050405020304" pitchFamily="18" charset="0"/>
+              </a:rPr>
+              <a:t>6</a:t>
             </a:r>
           </a:p>
         </p:txBody>
@@ -4353,6 +4548,7 @@
           </a:bodyPr>
           <a:lstStyle/>
           <a:p>
+            <a:pPr algn="just"/>
             <a:r>
               <a:rPr lang="ru-RU" dirty="0">
                 <a:latin typeface="Times New Roman" panose="02020603050405020304" pitchFamily="18" charset="0"/>
@@ -4362,12 +4558,52 @@
             </a:r>
           </a:p>
           <a:p>
+            <a:pPr algn="just"/>
             <a:r>
               <a:rPr lang="ru-RU" dirty="0">
                 <a:latin typeface="Times New Roman" panose="02020603050405020304" pitchFamily="18" charset="0"/>
                 <a:cs typeface="Times New Roman" panose="02020603050405020304" pitchFamily="18" charset="0"/>
               </a:rPr>
               <a:t>Стратегическая архитектура формулы: Патентная формула формируется как пирамида от общих концепций к частным применения.</a:t>
+            </a:r>
+          </a:p>
+        </p:txBody>
+      </p:sp>
+      <p:sp>
+        <p:nvSpPr>
+          <p:cNvPr id="4" name="TextBox 3">
+            <a:extLst>
+              <a:ext uri="{FF2B5EF4-FFF2-40B4-BE49-F238E27FC236}">
+                <a16:creationId xmlns:a16="http://schemas.microsoft.com/office/drawing/2014/main" id="{E017D93A-4A10-40A7-B09C-2539871D84D4}"/>
+              </a:ext>
+            </a:extLst>
+          </p:cNvPr>
+          <p:cNvSpPr txBox="1"/>
+          <p:nvPr/>
+        </p:nvSpPr>
+        <p:spPr>
+          <a:xfrm>
+            <a:off x="11832000" y="6498000"/>
+            <a:ext cx="360000" cy="360000"/>
+          </a:xfrm>
+          <a:prstGeom prst="rect">
+            <a:avLst/>
+          </a:prstGeom>
+          <a:noFill/>
+        </p:spPr>
+        <p:txBody>
+          <a:bodyPr wrap="none" rtlCol="0" anchor="ctr">
+            <a:spAutoFit/>
+          </a:bodyPr>
+          <a:lstStyle/>
+          <a:p>
+            <a:pPr algn="ctr"/>
+            <a:r>
+              <a:rPr lang="ru-RU" dirty="0">
+                <a:latin typeface="Times New Roman" panose="02020603050405020304" pitchFamily="18" charset="0"/>
+                <a:cs typeface="Times New Roman" panose="02020603050405020304" pitchFamily="18" charset="0"/>
+              </a:rPr>
+              <a:t>7</a:t>
             </a:r>
           </a:p>
         </p:txBody>
@@ -4469,7 +4705,7 @@
           </a:bodyPr>
           <a:lstStyle/>
           <a:p>
-            <a:pPr>
+            <a:pPr algn="just">
               <a:lnSpc>
                 <a:spcPct val="200000"/>
               </a:lnSpc>
@@ -4511,7 +4747,7 @@
             </a:r>
           </a:p>
           <a:p>
-            <a:pPr>
+            <a:pPr algn="just">
               <a:lnSpc>
                 <a:spcPct val="200000"/>
               </a:lnSpc>
@@ -4525,7 +4761,7 @@
             </a:r>
           </a:p>
           <a:p>
-            <a:pPr>
+            <a:pPr algn="just">
               <a:lnSpc>
                 <a:spcPct val="200000"/>
               </a:lnSpc>
@@ -4553,7 +4789,7 @@
             </a:r>
           </a:p>
           <a:p>
-            <a:pPr>
+            <a:pPr algn="just">
               <a:lnSpc>
                 <a:spcPct val="200000"/>
               </a:lnSpc>
@@ -4578,6 +4814,45 @@
                 <a:cs typeface="Times New Roman" panose="02020603050405020304" pitchFamily="18" charset="0"/>
               </a:rPr>
               <a:t>.</a:t>
+            </a:r>
+          </a:p>
+        </p:txBody>
+      </p:sp>
+      <p:sp>
+        <p:nvSpPr>
+          <p:cNvPr id="4" name="TextBox 3">
+            <a:extLst>
+              <a:ext uri="{FF2B5EF4-FFF2-40B4-BE49-F238E27FC236}">
+                <a16:creationId xmlns:a16="http://schemas.microsoft.com/office/drawing/2014/main" id="{853D3CEE-95CE-4648-B72F-2FD69DEC498E}"/>
+              </a:ext>
+            </a:extLst>
+          </p:cNvPr>
+          <p:cNvSpPr txBox="1"/>
+          <p:nvPr/>
+        </p:nvSpPr>
+        <p:spPr>
+          <a:xfrm>
+            <a:off x="11833504" y="6498000"/>
+            <a:ext cx="360000" cy="360000"/>
+          </a:xfrm>
+          <a:prstGeom prst="rect">
+            <a:avLst/>
+          </a:prstGeom>
+          <a:noFill/>
+        </p:spPr>
+        <p:txBody>
+          <a:bodyPr wrap="none" rtlCol="0" anchor="ctr">
+            <a:spAutoFit/>
+          </a:bodyPr>
+          <a:lstStyle/>
+          <a:p>
+            <a:pPr algn="ctr"/>
+            <a:r>
+              <a:rPr lang="ru-RU" dirty="0">
+                <a:latin typeface="Times New Roman" panose="02020603050405020304" pitchFamily="18" charset="0"/>
+                <a:cs typeface="Times New Roman" panose="02020603050405020304" pitchFamily="18" charset="0"/>
+              </a:rPr>
+              <a:t>8</a:t>
             </a:r>
           </a:p>
         </p:txBody>
@@ -4668,8 +4943,8 @@
         </p:nvSpPr>
         <p:spPr>
           <a:xfrm>
-            <a:off x="9421906" y="5629835"/>
-            <a:ext cx="2447363" cy="1048870"/>
+            <a:off x="7872000" y="6138000"/>
+            <a:ext cx="4320000" cy="720000"/>
           </a:xfrm>
         </p:spPr>
         <p:txBody>
@@ -4678,23 +4953,12 @@
           </a:bodyPr>
           <a:lstStyle/>
           <a:p>
-            <a:pPr algn="l"/>
             <a:r>
               <a:rPr lang="ru-RU" dirty="0">
                 <a:latin typeface="Times New Roman" panose="02020603050405020304" pitchFamily="18" charset="0"/>
                 <a:cs typeface="Times New Roman" panose="02020603050405020304" pitchFamily="18" charset="0"/>
               </a:rPr>
-              <a:t>Докладчик:</a:t>
-            </a:r>
-          </a:p>
-          <a:p>
-            <a:pPr algn="l"/>
-            <a:r>
-              <a:rPr lang="ru-RU" dirty="0">
-                <a:latin typeface="Times New Roman" panose="02020603050405020304" pitchFamily="18" charset="0"/>
-                <a:cs typeface="Times New Roman" panose="02020603050405020304" pitchFamily="18" charset="0"/>
-              </a:rPr>
-              <a:t>Климов Богдан</a:t>
+              <a:t>Докладчик: Климов Богдан</a:t>
             </a:r>
           </a:p>
         </p:txBody>
@@ -4702,7 +4966,7 @@
     </p:spTree>
     <p:extLst>
       <p:ext uri="{BB962C8B-B14F-4D97-AF65-F5344CB8AC3E}">
-        <p14:creationId xmlns:p14="http://schemas.microsoft.com/office/powerpoint/2010/main" val="3568895678"/>
+        <p14:creationId xmlns:p14="http://schemas.microsoft.com/office/powerpoint/2010/main" val="3845586377"/>
       </p:ext>
     </p:extLst>
   </p:cSld>
